--- a/curso_es/pptx/S81.pptx
+++ b/curso_es/pptx/S81.pptx
@@ -4242,7 +4242,7 @@
                 </a:solidFill>
                 <a:latin typeface="Nunito Sans"/>
               </a:rPr>
-              <a:t>Iker ve la lista del equipo de robótica del instituto y dice: «¿Una chica? Las chicas no valen para la tecnología».</a:t>
+              <a:t>Un chico ve la lista del equipo de robótica del instituto y dice: «¿Una chica? Las chicas no valen para la tecnología».</a:t>
             </a:r>
           </a:p>
         </p:txBody>
@@ -4569,7 +4569,7 @@
                 </a:solidFill>
                 <a:latin typeface="Nunito Sans"/>
               </a:rPr>
-              <a:t>Maialen cuenta: «En mi escuela de fútbol hay 40 chicos y 12 chicas» (ejemplo inventado). Naiara contesta: «¡Eso es un estereotipo!».</a:t>
+              <a:t>Una chica cuenta: «En mi escuela de fútbol hay 40 chicos y 12 chicas» (ejemplo inventado). Otra contesta: «¡Eso es un estereotipo!».</a:t>
             </a:r>
           </a:p>
         </p:txBody>
@@ -4617,7 +4617,7 @@
                 </a:solidFill>
                 <a:latin typeface="Nunito Sans"/>
               </a:rPr>
-              <a:t>¿Qué dice Maialen? Un número: cuántos chicos y chicas se han apuntado.</a:t>
+              <a:t>¿Qué dice la primera? Un número: cuántos chicos y chicas se han apuntado.</a:t>
             </a:r>
           </a:p>
           <a:p>
@@ -4896,7 +4896,7 @@
                 </a:solidFill>
                 <a:latin typeface="Nunito Sans"/>
               </a:rPr>
-              <a:t>Omar le dice a su hermana: «Organiza tú el cumpleaños de la ama, que las chicas sois más ordenadas». Lo dice como un elogio.</a:t>
+              <a:t>Un chico le dice a su hermana: «Organiza tú el cumpleaños de la ama, que las chicas sois más ordenadas». Lo dice como un elogio.</a:t>
             </a:r>
           </a:p>
         </p:txBody>
